--- a/這是聖潔之地（崇拜版）.pptx
+++ b/這是聖潔之地（崇拜版）.pptx
@@ -156,7 +156,7 @@
           <a:lstStyle/>
           <a:p>
             <a:r>
-              <a:rPr lang="en-US" altLang="zh-TW" smtClean="0"/>
+              <a:rPr lang="en-US" altLang="zh-TW"/>
               <a:t>Click to edit Master title style</a:t>
             </a:r>
             <a:endParaRPr lang="zh-TW" altLang="en-US"/>
@@ -275,7 +275,7 @@
           </a:lstStyle>
           <a:p>
             <a:r>
-              <a:rPr lang="en-US" altLang="zh-TW" smtClean="0"/>
+              <a:rPr lang="en-US" altLang="zh-TW"/>
               <a:t>Click to edit Master subtitle style</a:t>
             </a:r>
             <a:endParaRPr lang="zh-TW" altLang="en-US"/>
@@ -299,7 +299,7 @@
           <a:p>
             <a:fld id="{2A4A4A0E-21BB-422D-85F8-C26611A041BF}" type="datetimeFigureOut">
               <a:rPr lang="vi-VN" smtClean="0"/>
-              <a:t>10/06/2023</a:t>
+              <a:t>20/07/2024</a:t>
             </a:fld>
             <a:endParaRPr lang="vi-VN"/>
           </a:p>
@@ -393,7 +393,7 @@
           <a:lstStyle/>
           <a:p>
             <a:r>
-              <a:rPr lang="en-US" altLang="zh-TW" smtClean="0"/>
+              <a:rPr lang="en-US" altLang="zh-TW"/>
               <a:t>Click to edit Master title style</a:t>
             </a:r>
             <a:endParaRPr lang="zh-TW" altLang="en-US"/>
@@ -417,35 +417,35 @@
           <a:p>
             <a:pPr lvl="0"/>
             <a:r>
-              <a:rPr lang="en-US" altLang="zh-TW" smtClean="0"/>
+              <a:rPr lang="en-US" altLang="zh-TW"/>
               <a:t>Edit Master text styles</a:t>
             </a:r>
           </a:p>
           <a:p>
             <a:pPr lvl="1"/>
             <a:r>
-              <a:rPr lang="en-US" altLang="zh-TW" smtClean="0"/>
+              <a:rPr lang="en-US" altLang="zh-TW"/>
               <a:t>Second level</a:t>
             </a:r>
           </a:p>
           <a:p>
             <a:pPr lvl="2"/>
             <a:r>
-              <a:rPr lang="en-US" altLang="zh-TW" smtClean="0"/>
+              <a:rPr lang="en-US" altLang="zh-TW"/>
               <a:t>Third level</a:t>
             </a:r>
           </a:p>
           <a:p>
             <a:pPr lvl="3"/>
             <a:r>
-              <a:rPr lang="en-US" altLang="zh-TW" smtClean="0"/>
+              <a:rPr lang="en-US" altLang="zh-TW"/>
               <a:t>Fourth level</a:t>
             </a:r>
           </a:p>
           <a:p>
             <a:pPr lvl="4"/>
             <a:r>
-              <a:rPr lang="en-US" altLang="zh-TW" smtClean="0"/>
+              <a:rPr lang="en-US" altLang="zh-TW"/>
               <a:t>Fifth level</a:t>
             </a:r>
             <a:endParaRPr lang="zh-TW" altLang="en-US"/>
@@ -469,7 +469,7 @@
           <a:p>
             <a:fld id="{2A4A4A0E-21BB-422D-85F8-C26611A041BF}" type="datetimeFigureOut">
               <a:rPr lang="vi-VN" smtClean="0"/>
-              <a:t>10/06/2023</a:t>
+              <a:t>20/07/2024</a:t>
             </a:fld>
             <a:endParaRPr lang="vi-VN"/>
           </a:p>
@@ -568,7 +568,7 @@
           <a:lstStyle/>
           <a:p>
             <a:r>
-              <a:rPr lang="en-US" altLang="zh-TW" smtClean="0"/>
+              <a:rPr lang="en-US" altLang="zh-TW"/>
               <a:t>Click to edit Master title style</a:t>
             </a:r>
             <a:endParaRPr lang="zh-TW" altLang="en-US"/>
@@ -597,35 +597,35 @@
           <a:p>
             <a:pPr lvl="0"/>
             <a:r>
-              <a:rPr lang="en-US" altLang="zh-TW" smtClean="0"/>
+              <a:rPr lang="en-US" altLang="zh-TW"/>
               <a:t>Edit Master text styles</a:t>
             </a:r>
           </a:p>
           <a:p>
             <a:pPr lvl="1"/>
             <a:r>
-              <a:rPr lang="en-US" altLang="zh-TW" smtClean="0"/>
+              <a:rPr lang="en-US" altLang="zh-TW"/>
               <a:t>Second level</a:t>
             </a:r>
           </a:p>
           <a:p>
             <a:pPr lvl="2"/>
             <a:r>
-              <a:rPr lang="en-US" altLang="zh-TW" smtClean="0"/>
+              <a:rPr lang="en-US" altLang="zh-TW"/>
               <a:t>Third level</a:t>
             </a:r>
           </a:p>
           <a:p>
             <a:pPr lvl="3"/>
             <a:r>
-              <a:rPr lang="en-US" altLang="zh-TW" smtClean="0"/>
+              <a:rPr lang="en-US" altLang="zh-TW"/>
               <a:t>Fourth level</a:t>
             </a:r>
           </a:p>
           <a:p>
             <a:pPr lvl="4"/>
             <a:r>
-              <a:rPr lang="en-US" altLang="zh-TW" smtClean="0"/>
+              <a:rPr lang="en-US" altLang="zh-TW"/>
               <a:t>Fifth level</a:t>
             </a:r>
             <a:endParaRPr lang="zh-TW" altLang="en-US"/>
@@ -649,7 +649,7 @@
           <a:p>
             <a:fld id="{2A4A4A0E-21BB-422D-85F8-C26611A041BF}" type="datetimeFigureOut">
               <a:rPr lang="vi-VN" smtClean="0"/>
-              <a:t>10/06/2023</a:t>
+              <a:t>20/07/2024</a:t>
             </a:fld>
             <a:endParaRPr lang="vi-VN"/>
           </a:p>
@@ -743,7 +743,7 @@
           <a:lstStyle/>
           <a:p>
             <a:r>
-              <a:rPr lang="en-US" altLang="zh-TW" smtClean="0"/>
+              <a:rPr lang="en-US" altLang="zh-TW"/>
               <a:t>Click to edit Master title style</a:t>
             </a:r>
             <a:endParaRPr lang="zh-TW" altLang="en-US"/>
@@ -767,35 +767,35 @@
           <a:p>
             <a:pPr lvl="0"/>
             <a:r>
-              <a:rPr lang="en-US" altLang="zh-TW" smtClean="0"/>
+              <a:rPr lang="en-US" altLang="zh-TW"/>
               <a:t>Edit Master text styles</a:t>
             </a:r>
           </a:p>
           <a:p>
             <a:pPr lvl="1"/>
             <a:r>
-              <a:rPr lang="en-US" altLang="zh-TW" smtClean="0"/>
+              <a:rPr lang="en-US" altLang="zh-TW"/>
               <a:t>Second level</a:t>
             </a:r>
           </a:p>
           <a:p>
             <a:pPr lvl="2"/>
             <a:r>
-              <a:rPr lang="en-US" altLang="zh-TW" smtClean="0"/>
+              <a:rPr lang="en-US" altLang="zh-TW"/>
               <a:t>Third level</a:t>
             </a:r>
           </a:p>
           <a:p>
             <a:pPr lvl="3"/>
             <a:r>
-              <a:rPr lang="en-US" altLang="zh-TW" smtClean="0"/>
+              <a:rPr lang="en-US" altLang="zh-TW"/>
               <a:t>Fourth level</a:t>
             </a:r>
           </a:p>
           <a:p>
             <a:pPr lvl="4"/>
             <a:r>
-              <a:rPr lang="en-US" altLang="zh-TW" smtClean="0"/>
+              <a:rPr lang="en-US" altLang="zh-TW"/>
               <a:t>Fifth level</a:t>
             </a:r>
             <a:endParaRPr lang="zh-TW" altLang="en-US"/>
@@ -819,7 +819,7 @@
           <a:p>
             <a:fld id="{2A4A4A0E-21BB-422D-85F8-C26611A041BF}" type="datetimeFigureOut">
               <a:rPr lang="vi-VN" smtClean="0"/>
-              <a:t>10/06/2023</a:t>
+              <a:t>20/07/2024</a:t>
             </a:fld>
             <a:endParaRPr lang="vi-VN"/>
           </a:p>
@@ -922,7 +922,7 @@
           </a:lstStyle>
           <a:p>
             <a:r>
-              <a:rPr lang="en-US" altLang="zh-TW" smtClean="0"/>
+              <a:rPr lang="en-US" altLang="zh-TW"/>
               <a:t>Click to edit Master title style</a:t>
             </a:r>
             <a:endParaRPr lang="zh-TW" altLang="en-US"/>
@@ -1042,7 +1042,7 @@
           <a:p>
             <a:pPr lvl="0"/>
             <a:r>
-              <a:rPr lang="en-US" altLang="zh-TW" smtClean="0"/>
+              <a:rPr lang="en-US" altLang="zh-TW"/>
               <a:t>Edit Master text styles</a:t>
             </a:r>
           </a:p>
@@ -1065,7 +1065,7 @@
           <a:p>
             <a:fld id="{2A4A4A0E-21BB-422D-85F8-C26611A041BF}" type="datetimeFigureOut">
               <a:rPr lang="vi-VN" smtClean="0"/>
-              <a:t>10/06/2023</a:t>
+              <a:t>20/07/2024</a:t>
             </a:fld>
             <a:endParaRPr lang="vi-VN"/>
           </a:p>
@@ -1159,7 +1159,7 @@
           <a:lstStyle/>
           <a:p>
             <a:r>
-              <a:rPr lang="en-US" altLang="zh-TW" smtClean="0"/>
+              <a:rPr lang="en-US" altLang="zh-TW"/>
               <a:t>Click to edit Master title style</a:t>
             </a:r>
             <a:endParaRPr lang="zh-TW" altLang="en-US"/>
@@ -1216,35 +1216,35 @@
           <a:p>
             <a:pPr lvl="0"/>
             <a:r>
-              <a:rPr lang="en-US" altLang="zh-TW" smtClean="0"/>
+              <a:rPr lang="en-US" altLang="zh-TW"/>
               <a:t>Edit Master text styles</a:t>
             </a:r>
           </a:p>
           <a:p>
             <a:pPr lvl="1"/>
             <a:r>
-              <a:rPr lang="en-US" altLang="zh-TW" smtClean="0"/>
+              <a:rPr lang="en-US" altLang="zh-TW"/>
               <a:t>Second level</a:t>
             </a:r>
           </a:p>
           <a:p>
             <a:pPr lvl="2"/>
             <a:r>
-              <a:rPr lang="en-US" altLang="zh-TW" smtClean="0"/>
+              <a:rPr lang="en-US" altLang="zh-TW"/>
               <a:t>Third level</a:t>
             </a:r>
           </a:p>
           <a:p>
             <a:pPr lvl="3"/>
             <a:r>
-              <a:rPr lang="en-US" altLang="zh-TW" smtClean="0"/>
+              <a:rPr lang="en-US" altLang="zh-TW"/>
               <a:t>Fourth level</a:t>
             </a:r>
           </a:p>
           <a:p>
             <a:pPr lvl="4"/>
             <a:r>
-              <a:rPr lang="en-US" altLang="zh-TW" smtClean="0"/>
+              <a:rPr lang="en-US" altLang="zh-TW"/>
               <a:t>Fifth level</a:t>
             </a:r>
             <a:endParaRPr lang="zh-TW" altLang="en-US"/>
@@ -1301,35 +1301,35 @@
           <a:p>
             <a:pPr lvl="0"/>
             <a:r>
-              <a:rPr lang="en-US" altLang="zh-TW" smtClean="0"/>
+              <a:rPr lang="en-US" altLang="zh-TW"/>
               <a:t>Edit Master text styles</a:t>
             </a:r>
           </a:p>
           <a:p>
             <a:pPr lvl="1"/>
             <a:r>
-              <a:rPr lang="en-US" altLang="zh-TW" smtClean="0"/>
+              <a:rPr lang="en-US" altLang="zh-TW"/>
               <a:t>Second level</a:t>
             </a:r>
           </a:p>
           <a:p>
             <a:pPr lvl="2"/>
             <a:r>
-              <a:rPr lang="en-US" altLang="zh-TW" smtClean="0"/>
+              <a:rPr lang="en-US" altLang="zh-TW"/>
               <a:t>Third level</a:t>
             </a:r>
           </a:p>
           <a:p>
             <a:pPr lvl="3"/>
             <a:r>
-              <a:rPr lang="en-US" altLang="zh-TW" smtClean="0"/>
+              <a:rPr lang="en-US" altLang="zh-TW"/>
               <a:t>Fourth level</a:t>
             </a:r>
           </a:p>
           <a:p>
             <a:pPr lvl="4"/>
             <a:r>
-              <a:rPr lang="en-US" altLang="zh-TW" smtClean="0"/>
+              <a:rPr lang="en-US" altLang="zh-TW"/>
               <a:t>Fifth level</a:t>
             </a:r>
             <a:endParaRPr lang="zh-TW" altLang="en-US"/>
@@ -1353,7 +1353,7 @@
           <a:p>
             <a:fld id="{2A4A4A0E-21BB-422D-85F8-C26611A041BF}" type="datetimeFigureOut">
               <a:rPr lang="vi-VN" smtClean="0"/>
-              <a:t>10/06/2023</a:t>
+              <a:t>20/07/2024</a:t>
             </a:fld>
             <a:endParaRPr lang="vi-VN"/>
           </a:p>
@@ -1451,7 +1451,7 @@
           </a:lstStyle>
           <a:p>
             <a:r>
-              <a:rPr lang="en-US" altLang="zh-TW" smtClean="0"/>
+              <a:rPr lang="en-US" altLang="zh-TW"/>
               <a:t>Click to edit Master title style</a:t>
             </a:r>
             <a:endParaRPr lang="zh-TW" altLang="en-US"/>
@@ -1517,7 +1517,7 @@
           <a:p>
             <a:pPr lvl="0"/>
             <a:r>
-              <a:rPr lang="en-US" altLang="zh-TW" smtClean="0"/>
+              <a:rPr lang="en-US" altLang="zh-TW"/>
               <a:t>Edit Master text styles</a:t>
             </a:r>
           </a:p>
@@ -1573,35 +1573,35 @@
           <a:p>
             <a:pPr lvl="0"/>
             <a:r>
-              <a:rPr lang="en-US" altLang="zh-TW" smtClean="0"/>
+              <a:rPr lang="en-US" altLang="zh-TW"/>
               <a:t>Edit Master text styles</a:t>
             </a:r>
           </a:p>
           <a:p>
             <a:pPr lvl="1"/>
             <a:r>
-              <a:rPr lang="en-US" altLang="zh-TW" smtClean="0"/>
+              <a:rPr lang="en-US" altLang="zh-TW"/>
               <a:t>Second level</a:t>
             </a:r>
           </a:p>
           <a:p>
             <a:pPr lvl="2"/>
             <a:r>
-              <a:rPr lang="en-US" altLang="zh-TW" smtClean="0"/>
+              <a:rPr lang="en-US" altLang="zh-TW"/>
               <a:t>Third level</a:t>
             </a:r>
           </a:p>
           <a:p>
             <a:pPr lvl="3"/>
             <a:r>
-              <a:rPr lang="en-US" altLang="zh-TW" smtClean="0"/>
+              <a:rPr lang="en-US" altLang="zh-TW"/>
               <a:t>Fourth level</a:t>
             </a:r>
           </a:p>
           <a:p>
             <a:pPr lvl="4"/>
             <a:r>
-              <a:rPr lang="en-US" altLang="zh-TW" smtClean="0"/>
+              <a:rPr lang="en-US" altLang="zh-TW"/>
               <a:t>Fifth level</a:t>
             </a:r>
             <a:endParaRPr lang="zh-TW" altLang="en-US"/>
@@ -1667,7 +1667,7 @@
           <a:p>
             <a:pPr lvl="0"/>
             <a:r>
-              <a:rPr lang="en-US" altLang="zh-TW" smtClean="0"/>
+              <a:rPr lang="en-US" altLang="zh-TW"/>
               <a:t>Edit Master text styles</a:t>
             </a:r>
           </a:p>
@@ -1723,35 +1723,35 @@
           <a:p>
             <a:pPr lvl="0"/>
             <a:r>
-              <a:rPr lang="en-US" altLang="zh-TW" smtClean="0"/>
+              <a:rPr lang="en-US" altLang="zh-TW"/>
               <a:t>Edit Master text styles</a:t>
             </a:r>
           </a:p>
           <a:p>
             <a:pPr lvl="1"/>
             <a:r>
-              <a:rPr lang="en-US" altLang="zh-TW" smtClean="0"/>
+              <a:rPr lang="en-US" altLang="zh-TW"/>
               <a:t>Second level</a:t>
             </a:r>
           </a:p>
           <a:p>
             <a:pPr lvl="2"/>
             <a:r>
-              <a:rPr lang="en-US" altLang="zh-TW" smtClean="0"/>
+              <a:rPr lang="en-US" altLang="zh-TW"/>
               <a:t>Third level</a:t>
             </a:r>
           </a:p>
           <a:p>
             <a:pPr lvl="3"/>
             <a:r>
-              <a:rPr lang="en-US" altLang="zh-TW" smtClean="0"/>
+              <a:rPr lang="en-US" altLang="zh-TW"/>
               <a:t>Fourth level</a:t>
             </a:r>
           </a:p>
           <a:p>
             <a:pPr lvl="4"/>
             <a:r>
-              <a:rPr lang="en-US" altLang="zh-TW" smtClean="0"/>
+              <a:rPr lang="en-US" altLang="zh-TW"/>
               <a:t>Fifth level</a:t>
             </a:r>
             <a:endParaRPr lang="zh-TW" altLang="en-US"/>
@@ -1775,7 +1775,7 @@
           <a:p>
             <a:fld id="{2A4A4A0E-21BB-422D-85F8-C26611A041BF}" type="datetimeFigureOut">
               <a:rPr lang="vi-VN" smtClean="0"/>
-              <a:t>10/06/2023</a:t>
+              <a:t>20/07/2024</a:t>
             </a:fld>
             <a:endParaRPr lang="vi-VN"/>
           </a:p>
@@ -1869,7 +1869,7 @@
           <a:lstStyle/>
           <a:p>
             <a:r>
-              <a:rPr lang="en-US" altLang="zh-TW" smtClean="0"/>
+              <a:rPr lang="en-US" altLang="zh-TW"/>
               <a:t>Click to edit Master title style</a:t>
             </a:r>
             <a:endParaRPr lang="zh-TW" altLang="en-US"/>
@@ -1893,7 +1893,7 @@
           <a:p>
             <a:fld id="{2A4A4A0E-21BB-422D-85F8-C26611A041BF}" type="datetimeFigureOut">
               <a:rPr lang="vi-VN" smtClean="0"/>
-              <a:t>10/06/2023</a:t>
+              <a:t>20/07/2024</a:t>
             </a:fld>
             <a:endParaRPr lang="vi-VN"/>
           </a:p>
@@ -1988,7 +1988,7 @@
           <a:p>
             <a:fld id="{2A4A4A0E-21BB-422D-85F8-C26611A041BF}" type="datetimeFigureOut">
               <a:rPr lang="vi-VN" smtClean="0"/>
-              <a:t>10/06/2023</a:t>
+              <a:t>20/07/2024</a:t>
             </a:fld>
             <a:endParaRPr lang="vi-VN"/>
           </a:p>
@@ -2091,7 +2091,7 @@
           </a:lstStyle>
           <a:p>
             <a:r>
-              <a:rPr lang="en-US" altLang="zh-TW" smtClean="0"/>
+              <a:rPr lang="en-US" altLang="zh-TW"/>
               <a:t>Click to edit Master title style</a:t>
             </a:r>
             <a:endParaRPr lang="zh-TW" altLang="en-US"/>
@@ -2148,35 +2148,35 @@
           <a:p>
             <a:pPr lvl="0"/>
             <a:r>
-              <a:rPr lang="en-US" altLang="zh-TW" smtClean="0"/>
+              <a:rPr lang="en-US" altLang="zh-TW"/>
               <a:t>Edit Master text styles</a:t>
             </a:r>
           </a:p>
           <a:p>
             <a:pPr lvl="1"/>
             <a:r>
-              <a:rPr lang="en-US" altLang="zh-TW" smtClean="0"/>
+              <a:rPr lang="en-US" altLang="zh-TW"/>
               <a:t>Second level</a:t>
             </a:r>
           </a:p>
           <a:p>
             <a:pPr lvl="2"/>
             <a:r>
-              <a:rPr lang="en-US" altLang="zh-TW" smtClean="0"/>
+              <a:rPr lang="en-US" altLang="zh-TW"/>
               <a:t>Third level</a:t>
             </a:r>
           </a:p>
           <a:p>
             <a:pPr lvl="3"/>
             <a:r>
-              <a:rPr lang="en-US" altLang="zh-TW" smtClean="0"/>
+              <a:rPr lang="en-US" altLang="zh-TW"/>
               <a:t>Fourth level</a:t>
             </a:r>
           </a:p>
           <a:p>
             <a:pPr lvl="4"/>
             <a:r>
-              <a:rPr lang="en-US" altLang="zh-TW" smtClean="0"/>
+              <a:rPr lang="en-US" altLang="zh-TW"/>
               <a:t>Fifth level</a:t>
             </a:r>
             <a:endParaRPr lang="zh-TW" altLang="en-US"/>
@@ -2242,7 +2242,7 @@
           <a:p>
             <a:pPr lvl="0"/>
             <a:r>
-              <a:rPr lang="en-US" altLang="zh-TW" smtClean="0"/>
+              <a:rPr lang="en-US" altLang="zh-TW"/>
               <a:t>Edit Master text styles</a:t>
             </a:r>
           </a:p>
@@ -2265,7 +2265,7 @@
           <a:p>
             <a:fld id="{2A4A4A0E-21BB-422D-85F8-C26611A041BF}" type="datetimeFigureOut">
               <a:rPr lang="vi-VN" smtClean="0"/>
-              <a:t>10/06/2023</a:t>
+              <a:t>20/07/2024</a:t>
             </a:fld>
             <a:endParaRPr lang="vi-VN"/>
           </a:p>
@@ -2368,7 +2368,7 @@
           </a:lstStyle>
           <a:p>
             <a:r>
-              <a:rPr lang="en-US" altLang="zh-TW" smtClean="0"/>
+              <a:rPr lang="en-US" altLang="zh-TW"/>
               <a:t>Click to edit Master title style</a:t>
             </a:r>
             <a:endParaRPr lang="zh-TW" altLang="en-US"/>
@@ -2433,7 +2433,7 @@
           </a:lstStyle>
           <a:p>
             <a:r>
-              <a:rPr lang="en-US" altLang="zh-TW" smtClean="0"/>
+              <a:rPr lang="en-US" altLang="zh-TW"/>
               <a:t>Click icon to add picture</a:t>
             </a:r>
             <a:endParaRPr lang="zh-TW" altLang="en-US"/>
@@ -2499,7 +2499,7 @@
           <a:p>
             <a:pPr lvl="0"/>
             <a:r>
-              <a:rPr lang="en-US" altLang="zh-TW" smtClean="0"/>
+              <a:rPr lang="en-US" altLang="zh-TW"/>
               <a:t>Edit Master text styles</a:t>
             </a:r>
           </a:p>
@@ -2522,7 +2522,7 @@
           <a:p>
             <a:fld id="{2A4A4A0E-21BB-422D-85F8-C26611A041BF}" type="datetimeFigureOut">
               <a:rPr lang="vi-VN" smtClean="0"/>
-              <a:t>10/06/2023</a:t>
+              <a:t>20/07/2024</a:t>
             </a:fld>
             <a:endParaRPr lang="vi-VN"/>
           </a:p>
@@ -2636,10 +2636,9 @@
           <a:lstStyle/>
           <a:p>
             <a:r>
-              <a:rPr lang="zh-TW" altLang="en-US" smtClean="0"/>
+              <a:rPr lang="zh-TW" altLang="en-US"/>
               <a:t>按一下以編輯母片標題樣式</a:t>
             </a:r>
-            <a:endParaRPr lang="zh-TW" altLang="en-US"/>
           </a:p>
         </p:txBody>
       </p:sp>
@@ -2670,38 +2669,37 @@
           <a:p>
             <a:pPr lvl="0"/>
             <a:r>
-              <a:rPr lang="zh-TW" altLang="en-US" smtClean="0"/>
+              <a:rPr lang="zh-TW" altLang="en-US"/>
               <a:t>按一下以編輯母片文字樣式</a:t>
             </a:r>
           </a:p>
           <a:p>
             <a:pPr lvl="1"/>
             <a:r>
-              <a:rPr lang="zh-TW" altLang="en-US" smtClean="0"/>
+              <a:rPr lang="zh-TW" altLang="en-US"/>
               <a:t>第二層</a:t>
             </a:r>
           </a:p>
           <a:p>
             <a:pPr lvl="2"/>
             <a:r>
-              <a:rPr lang="zh-TW" altLang="en-US" smtClean="0"/>
+              <a:rPr lang="zh-TW" altLang="en-US"/>
               <a:t>第三層</a:t>
             </a:r>
           </a:p>
           <a:p>
             <a:pPr lvl="3"/>
             <a:r>
-              <a:rPr lang="zh-TW" altLang="en-US" smtClean="0"/>
+              <a:rPr lang="zh-TW" altLang="en-US"/>
               <a:t>第四層</a:t>
             </a:r>
           </a:p>
           <a:p>
             <a:pPr lvl="4"/>
             <a:r>
-              <a:rPr lang="zh-TW" altLang="en-US" smtClean="0"/>
+              <a:rPr lang="zh-TW" altLang="en-US"/>
               <a:t>第五層</a:t>
             </a:r>
-            <a:endParaRPr lang="zh-TW" altLang="en-US"/>
           </a:p>
         </p:txBody>
       </p:sp>
@@ -2740,7 +2738,7 @@
           <a:p>
             <a:fld id="{2A4A4A0E-21BB-422D-85F8-C26611A041BF}" type="datetimeFigureOut">
               <a:rPr lang="vi-VN" smtClean="0"/>
-              <a:t>10/06/2023</a:t>
+              <a:t>20/07/2024</a:t>
             </a:fld>
             <a:endParaRPr lang="vi-VN"/>
           </a:p>
@@ -3289,7 +3287,7 @@
               <a:t>( </a:t>
             </a:r>
             <a:r>
-              <a:rPr lang="zh-CN" altLang="en-US" sz="4000" b="1" dirty="0" smtClean="0">
+              <a:rPr lang="zh-CN" altLang="en-US" sz="4000" b="1" dirty="0">
                 <a:solidFill>
                   <a:srgbClr val="660033"/>
                 </a:solidFill>
@@ -3297,10 +3295,10 @@
                 <a:latin typeface="Microsoft JhengHei" panose="020B0604030504040204" pitchFamily="34" charset="-120"/>
                 <a:ea typeface="Microsoft JhengHei" panose="020B0604030504040204" pitchFamily="34" charset="-120"/>
               </a:rPr>
-              <a:t>正</a:t>
-            </a:r>
-            <a:r>
-              <a:rPr lang="en-US" sz="4000" b="1" dirty="0" smtClean="0">
+              <a:t>正歌</a:t>
+            </a:r>
+            <a:r>
+              <a:rPr lang="en-US" sz="4000" b="1" dirty="0">
                 <a:solidFill>
                   <a:srgbClr val="660033"/>
                 </a:solidFill>
@@ -3308,18 +3306,7 @@
                 <a:latin typeface="Microsoft JhengHei" panose="020B0604030504040204" pitchFamily="34" charset="-120"/>
                 <a:ea typeface="Microsoft JhengHei" panose="020B0604030504040204" pitchFamily="34" charset="-120"/>
               </a:rPr>
-              <a:t> </a:t>
-            </a:r>
-            <a:r>
-              <a:rPr lang="en-US" sz="4000" b="1" dirty="0">
-                <a:solidFill>
-                  <a:srgbClr val="660033"/>
-                </a:solidFill>
-                <a:effectLst/>
-                <a:latin typeface="Microsoft JhengHei" panose="020B0604030504040204" pitchFamily="34" charset="-120"/>
-                <a:ea typeface="Microsoft JhengHei" panose="020B0604030504040204" pitchFamily="34" charset="-120"/>
-              </a:rPr>
-              <a:t>)</a:t>
+              <a:t> )</a:t>
             </a:r>
             <a:endParaRPr lang="vi-VN" sz="4000" b="1" dirty="0">
               <a:solidFill>
@@ -3463,7 +3450,7 @@
               <a:t>( </a:t>
             </a:r>
             <a:r>
-              <a:rPr lang="zh-CN" altLang="en-US" sz="4000" b="1" dirty="0" smtClean="0">
+              <a:rPr lang="zh-CN" altLang="en-US" sz="4000" b="1" dirty="0">
                 <a:solidFill>
                   <a:srgbClr val="660033"/>
                 </a:solidFill>
@@ -3471,10 +3458,10 @@
                 <a:latin typeface="Microsoft JhengHei" panose="020B0604030504040204" pitchFamily="34" charset="-120"/>
                 <a:ea typeface="Microsoft JhengHei" panose="020B0604030504040204" pitchFamily="34" charset="-120"/>
               </a:rPr>
-              <a:t>正</a:t>
-            </a:r>
-            <a:r>
-              <a:rPr lang="en-US" sz="4000" b="1" dirty="0" smtClean="0">
+              <a:t>正歌</a:t>
+            </a:r>
+            <a:r>
+              <a:rPr lang="en-US" sz="4000" b="1" dirty="0">
                 <a:solidFill>
                   <a:srgbClr val="660033"/>
                 </a:solidFill>
@@ -3482,18 +3469,7 @@
                 <a:latin typeface="Microsoft JhengHei" panose="020B0604030504040204" pitchFamily="34" charset="-120"/>
                 <a:ea typeface="Microsoft JhengHei" panose="020B0604030504040204" pitchFamily="34" charset="-120"/>
               </a:rPr>
-              <a:t> </a:t>
-            </a:r>
-            <a:r>
-              <a:rPr lang="en-US" sz="4000" b="1" dirty="0">
-                <a:solidFill>
-                  <a:srgbClr val="660033"/>
-                </a:solidFill>
-                <a:effectLst/>
-                <a:latin typeface="Microsoft JhengHei" panose="020B0604030504040204" pitchFamily="34" charset="-120"/>
-                <a:ea typeface="Microsoft JhengHei" panose="020B0604030504040204" pitchFamily="34" charset="-120"/>
-              </a:rPr>
-              <a:t>)</a:t>
+              <a:t> )</a:t>
             </a:r>
             <a:endParaRPr lang="vi-VN" sz="4000" b="1" dirty="0">
               <a:solidFill>
@@ -3569,47 +3545,7 @@
                 <a:latin typeface="Microsoft JhengHei" panose="020B0604030504040204" pitchFamily="34" charset="-120"/>
                 <a:ea typeface="Microsoft JhengHei" panose="020B0604030504040204" pitchFamily="34" charset="-120"/>
               </a:rPr>
-              <a:t>我全心來</a:t>
-            </a:r>
-            <a:r>
-              <a:rPr lang="zh-TW" altLang="en-US" sz="6400" b="1" dirty="0">
-                <a:solidFill>
-                  <a:srgbClr val="660033"/>
-                </a:solidFill>
-                <a:latin typeface="Microsoft JhengHei" panose="020B0604030504040204" pitchFamily="34" charset="-120"/>
-                <a:ea typeface="Microsoft JhengHei" panose="020B0604030504040204" pitchFamily="34" charset="-120"/>
-              </a:rPr>
-              <a:t>敬</a:t>
-            </a:r>
-            <a:r>
-              <a:rPr lang="zh-TW" altLang="en-US" sz="6400" b="1" dirty="0">
-                <a:solidFill>
-                  <a:srgbClr val="660033"/>
-                </a:solidFill>
-                <a:latin typeface="Microsoft JhengHei" panose="020B0604030504040204" pitchFamily="34" charset="-120"/>
-                <a:ea typeface="Microsoft JhengHei" panose="020B0604030504040204" pitchFamily="34" charset="-120"/>
-              </a:rPr>
-              <a:t>拜</a:t>
-            </a:r>
-            <a:r>
-              <a:rPr lang="zh-TW" altLang="en-US" sz="6400" b="1" dirty="0">
-                <a:solidFill>
-                  <a:srgbClr val="660033"/>
-                </a:solidFill>
-                <a:latin typeface="Microsoft JhengHei" panose="020B0604030504040204" pitchFamily="34" charset="-120"/>
-                <a:ea typeface="Microsoft JhengHei" panose="020B0604030504040204" pitchFamily="34" charset="-120"/>
-              </a:rPr>
-              <a:t>祢</a:t>
-            </a:r>
-            <a:r>
-              <a:rPr lang="zh-TW" altLang="en-US" sz="6400" b="1" dirty="0">
-                <a:solidFill>
-                  <a:srgbClr val="660033"/>
-                </a:solidFill>
-                <a:latin typeface="Microsoft JhengHei" panose="020B0604030504040204" pitchFamily="34" charset="-120"/>
-                <a:ea typeface="Microsoft JhengHei" panose="020B0604030504040204" pitchFamily="34" charset="-120"/>
-              </a:rPr>
-              <a:t>主</a:t>
+              <a:t>我全心來敬拜祢主</a:t>
             </a:r>
             <a:endParaRPr lang="en-US" altLang="zh-TW" sz="6400" b="1" dirty="0">
               <a:solidFill>
@@ -3631,17 +3567,7 @@
                 <a:latin typeface="Microsoft JhengHei" panose="020B0604030504040204" pitchFamily="34" charset="-120"/>
                 <a:ea typeface="Microsoft JhengHei" panose="020B0604030504040204" pitchFamily="34" charset="-120"/>
               </a:rPr>
-              <a:t>高舉雙手敬</a:t>
-            </a:r>
-            <a:r>
-              <a:rPr lang="zh-TW" altLang="en-US" sz="6400" b="1" dirty="0">
-                <a:solidFill>
-                  <a:srgbClr val="660033"/>
-                </a:solidFill>
-                <a:latin typeface="Microsoft JhengHei" panose="020B0604030504040204" pitchFamily="34" charset="-120"/>
-                <a:ea typeface="Microsoft JhengHei" panose="020B0604030504040204" pitchFamily="34" charset="-120"/>
-              </a:rPr>
-              <a:t>拜祢主</a:t>
+              <a:t>高舉雙手敬拜祢主</a:t>
             </a:r>
             <a:endParaRPr lang="en-US" altLang="zh-TW" sz="6400" b="1" dirty="0">
               <a:solidFill>
@@ -3688,7 +3614,7 @@
               <a:t>( </a:t>
             </a:r>
             <a:r>
-              <a:rPr lang="zh-CN" altLang="en-US" sz="4000" b="1" dirty="0" smtClean="0">
+              <a:rPr lang="zh-CN" altLang="en-US" sz="4000" b="1" dirty="0">
                 <a:solidFill>
                   <a:srgbClr val="660033"/>
                 </a:solidFill>
@@ -3696,10 +3622,10 @@
                 <a:latin typeface="Microsoft JhengHei" panose="020B0604030504040204" pitchFamily="34" charset="-120"/>
                 <a:ea typeface="Microsoft JhengHei" panose="020B0604030504040204" pitchFamily="34" charset="-120"/>
               </a:rPr>
-              <a:t>副</a:t>
-            </a:r>
-            <a:r>
-              <a:rPr lang="en-US" sz="4000" b="1" dirty="0" smtClean="0">
+              <a:t>副歌</a:t>
+            </a:r>
+            <a:r>
+              <a:rPr lang="en-US" sz="4000" b="1" dirty="0">
                 <a:solidFill>
                   <a:srgbClr val="660033"/>
                 </a:solidFill>
@@ -3707,18 +3633,7 @@
                 <a:latin typeface="Microsoft JhengHei" panose="020B0604030504040204" pitchFamily="34" charset="-120"/>
                 <a:ea typeface="Microsoft JhengHei" panose="020B0604030504040204" pitchFamily="34" charset="-120"/>
               </a:rPr>
-              <a:t> </a:t>
-            </a:r>
-            <a:r>
-              <a:rPr lang="en-US" sz="4000" b="1" dirty="0">
-                <a:solidFill>
-                  <a:srgbClr val="660033"/>
-                </a:solidFill>
-                <a:effectLst/>
-                <a:latin typeface="Microsoft JhengHei" panose="020B0604030504040204" pitchFamily="34" charset="-120"/>
-                <a:ea typeface="Microsoft JhengHei" panose="020B0604030504040204" pitchFamily="34" charset="-120"/>
-              </a:rPr>
-              <a:t>)</a:t>
+              <a:t> )</a:t>
             </a:r>
             <a:endParaRPr lang="vi-VN" sz="4000" b="1" dirty="0">
               <a:solidFill>
@@ -3794,17 +3709,7 @@
                 <a:latin typeface="Microsoft JhengHei" panose="020B0604030504040204" pitchFamily="34" charset="-120"/>
                 <a:ea typeface="Microsoft JhengHei" panose="020B0604030504040204" pitchFamily="34" charset="-120"/>
               </a:rPr>
-              <a:t>在祢大</a:t>
-            </a:r>
-            <a:r>
-              <a:rPr lang="zh-TW" altLang="en-US" sz="6400" b="1" dirty="0">
-                <a:solidFill>
-                  <a:srgbClr val="660033"/>
-                </a:solidFill>
-                <a:latin typeface="Microsoft JhengHei" panose="020B0604030504040204" pitchFamily="34" charset="-120"/>
-                <a:ea typeface="Microsoft JhengHei" panose="020B0604030504040204" pitchFamily="34" charset="-120"/>
-              </a:rPr>
-              <a:t>能榮耀光中</a:t>
+              <a:t>在祢大能榮耀光中</a:t>
             </a:r>
             <a:endParaRPr lang="en-US" altLang="zh-TW" sz="6400" b="1" dirty="0">
               <a:solidFill>
@@ -3819,44 +3724,14 @@
               <a:buNone/>
             </a:pPr>
             <a:r>
-              <a:rPr lang="zh-TW" altLang="en-US" sz="6400" b="1" dirty="0" smtClean="0">
+              <a:rPr lang="zh-TW" altLang="en-US" sz="6400" b="1" dirty="0">
                 <a:solidFill>
                   <a:srgbClr val="660033"/>
                 </a:solidFill>
                 <a:latin typeface="Microsoft JhengHei" panose="020B0604030504040204" pitchFamily="34" charset="-120"/>
                 <a:ea typeface="Microsoft JhengHei" panose="020B0604030504040204" pitchFamily="34" charset="-120"/>
               </a:rPr>
-              <a:t>我俯</a:t>
-            </a:r>
-            <a:r>
-              <a:rPr lang="zh-TW" altLang="en-US" sz="6400" b="1" dirty="0">
-                <a:solidFill>
-                  <a:srgbClr val="660033"/>
-                </a:solidFill>
-                <a:latin typeface="Microsoft JhengHei" panose="020B0604030504040204" pitchFamily="34" charset="-120"/>
-                <a:ea typeface="Microsoft JhengHei" panose="020B0604030504040204" pitchFamily="34" charset="-120"/>
-              </a:rPr>
-              <a:t>伏</a:t>
-            </a:r>
-            <a:r>
-              <a:rPr lang="zh-TW" altLang="en-US" sz="6400" b="1" dirty="0">
-                <a:solidFill>
-                  <a:srgbClr val="660033"/>
-                </a:solidFill>
-                <a:latin typeface="Microsoft JhengHei" panose="020B0604030504040204" pitchFamily="34" charset="-120"/>
-                <a:ea typeface="Microsoft JhengHei" panose="020B0604030504040204" pitchFamily="34" charset="-120"/>
-              </a:rPr>
-              <a:t>在祢寶</a:t>
-            </a:r>
-            <a:r>
-              <a:rPr lang="zh-TW" altLang="en-US" sz="6400" b="1" dirty="0">
-                <a:solidFill>
-                  <a:srgbClr val="660033"/>
-                </a:solidFill>
-                <a:latin typeface="Microsoft JhengHei" panose="020B0604030504040204" pitchFamily="34" charset="-120"/>
-                <a:ea typeface="Microsoft JhengHei" panose="020B0604030504040204" pitchFamily="34" charset="-120"/>
-              </a:rPr>
-              <a:t>座前</a:t>
+              <a:t>我俯伏在祢寶座前</a:t>
             </a:r>
             <a:endParaRPr lang="vi-VN" sz="6400" b="1" dirty="0">
               <a:solidFill>
@@ -3903,7 +3778,7 @@
               <a:t>( </a:t>
             </a:r>
             <a:r>
-              <a:rPr lang="zh-CN" altLang="en-US" sz="4000" b="1" dirty="0" smtClean="0">
+              <a:rPr lang="zh-CN" altLang="en-US" sz="4000" b="1" dirty="0">
                 <a:solidFill>
                   <a:srgbClr val="660033"/>
                 </a:solidFill>
@@ -3911,10 +3786,10 @@
                 <a:latin typeface="Microsoft JhengHei" panose="020B0604030504040204" pitchFamily="34" charset="-120"/>
                 <a:ea typeface="Microsoft JhengHei" panose="020B0604030504040204" pitchFamily="34" charset="-120"/>
               </a:rPr>
-              <a:t>副</a:t>
-            </a:r>
-            <a:r>
-              <a:rPr lang="en-US" sz="4000" b="1" dirty="0" smtClean="0">
+              <a:t>副歌</a:t>
+            </a:r>
+            <a:r>
+              <a:rPr lang="en-US" sz="4000" b="1" dirty="0">
                 <a:solidFill>
                   <a:srgbClr val="660033"/>
                 </a:solidFill>
@@ -3922,18 +3797,7 @@
                 <a:latin typeface="Microsoft JhengHei" panose="020B0604030504040204" pitchFamily="34" charset="-120"/>
                 <a:ea typeface="Microsoft JhengHei" panose="020B0604030504040204" pitchFamily="34" charset="-120"/>
               </a:rPr>
-              <a:t> </a:t>
-            </a:r>
-            <a:r>
-              <a:rPr lang="en-US" sz="4000" b="1" dirty="0">
-                <a:solidFill>
-                  <a:srgbClr val="660033"/>
-                </a:solidFill>
-                <a:effectLst/>
-                <a:latin typeface="Microsoft JhengHei" panose="020B0604030504040204" pitchFamily="34" charset="-120"/>
-                <a:ea typeface="Microsoft JhengHei" panose="020B0604030504040204" pitchFamily="34" charset="-120"/>
-              </a:rPr>
-              <a:t>)</a:t>
+              <a:t> )</a:t>
             </a:r>
             <a:endParaRPr lang="vi-VN" sz="4000" b="1" dirty="0">
               <a:solidFill>
@@ -4009,17 +3873,7 @@
                 <a:latin typeface="Microsoft JhengHei" panose="020B0604030504040204" pitchFamily="34" charset="-120"/>
                 <a:ea typeface="Microsoft JhengHei" panose="020B0604030504040204" pitchFamily="34" charset="-120"/>
               </a:rPr>
-              <a:t>我全心來敬</a:t>
-            </a:r>
-            <a:r>
-              <a:rPr lang="zh-TW" altLang="en-US" sz="6400" b="1" dirty="0">
-                <a:solidFill>
-                  <a:srgbClr val="660033"/>
-                </a:solidFill>
-                <a:latin typeface="Microsoft JhengHei" panose="020B0604030504040204" pitchFamily="34" charset="-120"/>
-                <a:ea typeface="Microsoft JhengHei" panose="020B0604030504040204" pitchFamily="34" charset="-120"/>
-              </a:rPr>
-              <a:t>拜祢主</a:t>
+              <a:t>我全心來敬拜祢主</a:t>
             </a:r>
             <a:endParaRPr lang="en-US" altLang="zh-TW" sz="6400" b="1" dirty="0">
               <a:solidFill>
@@ -4041,17 +3895,7 @@
                 <a:latin typeface="Microsoft JhengHei" panose="020B0604030504040204" pitchFamily="34" charset="-120"/>
                 <a:ea typeface="Microsoft JhengHei" panose="020B0604030504040204" pitchFamily="34" charset="-120"/>
               </a:rPr>
-              <a:t>高舉雙手敬</a:t>
-            </a:r>
-            <a:r>
-              <a:rPr lang="zh-TW" altLang="en-US" sz="6400" b="1" dirty="0">
-                <a:solidFill>
-                  <a:srgbClr val="660033"/>
-                </a:solidFill>
-                <a:latin typeface="Microsoft JhengHei" panose="020B0604030504040204" pitchFamily="34" charset="-120"/>
-                <a:ea typeface="Microsoft JhengHei" panose="020B0604030504040204" pitchFamily="34" charset="-120"/>
-              </a:rPr>
-              <a:t>拜祢主</a:t>
+              <a:t>高舉雙手敬拜祢主</a:t>
             </a:r>
             <a:endParaRPr lang="en-US" altLang="zh-TW" sz="6400" b="1" dirty="0">
               <a:solidFill>
@@ -4098,7 +3942,7 @@
               <a:t>( </a:t>
             </a:r>
             <a:r>
-              <a:rPr lang="zh-CN" altLang="en-US" sz="4000" b="1" dirty="0" smtClean="0">
+              <a:rPr lang="zh-CN" altLang="en-US" sz="4000" b="1" dirty="0">
                 <a:solidFill>
                   <a:srgbClr val="660033"/>
                 </a:solidFill>
@@ -4106,10 +3950,10 @@
                 <a:latin typeface="Microsoft JhengHei" panose="020B0604030504040204" pitchFamily="34" charset="-120"/>
                 <a:ea typeface="Microsoft JhengHei" panose="020B0604030504040204" pitchFamily="34" charset="-120"/>
               </a:rPr>
-              <a:t>副</a:t>
-            </a:r>
-            <a:r>
-              <a:rPr lang="en-US" sz="4000" b="1" dirty="0" smtClean="0">
+              <a:t>副歌</a:t>
+            </a:r>
+            <a:r>
+              <a:rPr lang="en-US" sz="4000" b="1" dirty="0">
                 <a:solidFill>
                   <a:srgbClr val="660033"/>
                 </a:solidFill>
@@ -4117,18 +3961,7 @@
                 <a:latin typeface="Microsoft JhengHei" panose="020B0604030504040204" pitchFamily="34" charset="-120"/>
                 <a:ea typeface="Microsoft JhengHei" panose="020B0604030504040204" pitchFamily="34" charset="-120"/>
               </a:rPr>
-              <a:t> </a:t>
-            </a:r>
-            <a:r>
-              <a:rPr lang="en-US" sz="4000" b="1" dirty="0">
-                <a:solidFill>
-                  <a:srgbClr val="660033"/>
-                </a:solidFill>
-                <a:effectLst/>
-                <a:latin typeface="Microsoft JhengHei" panose="020B0604030504040204" pitchFamily="34" charset="-120"/>
-                <a:ea typeface="Microsoft JhengHei" panose="020B0604030504040204" pitchFamily="34" charset="-120"/>
-              </a:rPr>
-              <a:t>)</a:t>
+              <a:t> )</a:t>
             </a:r>
             <a:endParaRPr lang="vi-VN" sz="4000" b="1" dirty="0">
               <a:solidFill>
@@ -4204,17 +4037,7 @@
                 <a:latin typeface="Microsoft JhengHei" panose="020B0604030504040204" pitchFamily="34" charset="-120"/>
                 <a:ea typeface="Microsoft JhengHei" panose="020B0604030504040204" pitchFamily="34" charset="-120"/>
               </a:rPr>
-              <a:t>在祢大</a:t>
-            </a:r>
-            <a:r>
-              <a:rPr lang="zh-TW" altLang="en-US" sz="6400" b="1" dirty="0">
-                <a:solidFill>
-                  <a:srgbClr val="660033"/>
-                </a:solidFill>
-                <a:latin typeface="Microsoft JhengHei" panose="020B0604030504040204" pitchFamily="34" charset="-120"/>
-                <a:ea typeface="Microsoft JhengHei" panose="020B0604030504040204" pitchFamily="34" charset="-120"/>
-              </a:rPr>
-              <a:t>能榮耀光中</a:t>
+              <a:t>在祢大能榮耀光中</a:t>
             </a:r>
             <a:endParaRPr lang="en-US" altLang="zh-TW" sz="6400" b="1" dirty="0">
               <a:solidFill>
@@ -4236,17 +4059,7 @@
                 <a:latin typeface="Microsoft JhengHei" panose="020B0604030504040204" pitchFamily="34" charset="-120"/>
                 <a:ea typeface="Microsoft JhengHei" panose="020B0604030504040204" pitchFamily="34" charset="-120"/>
               </a:rPr>
-              <a:t>我與眾天使俯伏深深敬</a:t>
-            </a:r>
-            <a:r>
-              <a:rPr lang="zh-TW" altLang="en-US" sz="6400" b="1" dirty="0">
-                <a:solidFill>
-                  <a:srgbClr val="660033"/>
-                </a:solidFill>
-                <a:latin typeface="Microsoft JhengHei" panose="020B0604030504040204" pitchFamily="34" charset="-120"/>
-                <a:ea typeface="Microsoft JhengHei" panose="020B0604030504040204" pitchFamily="34" charset="-120"/>
-              </a:rPr>
-              <a:t>拜祢</a:t>
+              <a:t>我與眾天使俯伏深深敬拜祢</a:t>
             </a:r>
             <a:endParaRPr lang="vi-VN" sz="6400" b="1" dirty="0">
               <a:solidFill>
@@ -4293,7 +4106,7 @@
               <a:t>( </a:t>
             </a:r>
             <a:r>
-              <a:rPr lang="zh-CN" altLang="en-US" sz="4000" b="1" dirty="0" smtClean="0">
+              <a:rPr lang="zh-CN" altLang="en-US" sz="4000" b="1" dirty="0">
                 <a:solidFill>
                   <a:srgbClr val="660033"/>
                 </a:solidFill>
@@ -4301,10 +4114,10 @@
                 <a:latin typeface="Microsoft JhengHei" panose="020B0604030504040204" pitchFamily="34" charset="-120"/>
                 <a:ea typeface="Microsoft JhengHei" panose="020B0604030504040204" pitchFamily="34" charset="-120"/>
               </a:rPr>
-              <a:t>副</a:t>
-            </a:r>
-            <a:r>
-              <a:rPr lang="en-US" sz="4000" b="1" dirty="0" smtClean="0">
+              <a:t>副歌</a:t>
+            </a:r>
+            <a:r>
+              <a:rPr lang="en-US" sz="4000" b="1" dirty="0">
                 <a:solidFill>
                   <a:srgbClr val="660033"/>
                 </a:solidFill>
@@ -4312,18 +4125,7 @@
                 <a:latin typeface="Microsoft JhengHei" panose="020B0604030504040204" pitchFamily="34" charset="-120"/>
                 <a:ea typeface="Microsoft JhengHei" panose="020B0604030504040204" pitchFamily="34" charset="-120"/>
               </a:rPr>
-              <a:t> </a:t>
-            </a:r>
-            <a:r>
-              <a:rPr lang="en-US" sz="4000" b="1" dirty="0">
-                <a:solidFill>
-                  <a:srgbClr val="660033"/>
-                </a:solidFill>
-                <a:effectLst/>
-                <a:latin typeface="Microsoft JhengHei" panose="020B0604030504040204" pitchFamily="34" charset="-120"/>
-                <a:ea typeface="Microsoft JhengHei" panose="020B0604030504040204" pitchFamily="34" charset="-120"/>
-              </a:rPr>
-              <a:t>)</a:t>
+              <a:t> )</a:t>
             </a:r>
             <a:endParaRPr lang="vi-VN" sz="4000" b="1" dirty="0">
               <a:solidFill>
